--- a/Windy_課題と今後.pptx
+++ b/Windy_課題と今後.pptx
@@ -3106,7 +3106,7 @@
         </p:nvSpPr>
         <p:spPr>
           <a:xfrm>
-            <a:off x="0" y="0"/>
+            <a:off x="0" y="344384"/>
             <a:ext cx="12188952" cy="6858000"/>
           </a:xfrm>
           <a:prstGeom prst="rect">
